--- a/Præsentation1.pptx
+++ b/Præsentation1.pptx
@@ -5,21 +5,22 @@
     <p:sldMasterId id="2147483648" r:id="rId1"/>
   </p:sldMasterIdLst>
   <p:notesMasterIdLst>
-    <p:notesMasterId r:id="rId14"/>
+    <p:notesMasterId r:id="rId15"/>
   </p:notesMasterIdLst>
   <p:sldIdLst>
     <p:sldId id="256" r:id="rId2"/>
-    <p:sldId id="257" r:id="rId3"/>
-    <p:sldId id="271" r:id="rId4"/>
-    <p:sldId id="258" r:id="rId5"/>
-    <p:sldId id="259" r:id="rId6"/>
-    <p:sldId id="264" r:id="rId7"/>
-    <p:sldId id="265" r:id="rId8"/>
-    <p:sldId id="266" r:id="rId9"/>
-    <p:sldId id="267" r:id="rId10"/>
-    <p:sldId id="268" r:id="rId11"/>
-    <p:sldId id="269" r:id="rId12"/>
-    <p:sldId id="270" r:id="rId13"/>
+    <p:sldId id="272" r:id="rId3"/>
+    <p:sldId id="257" r:id="rId4"/>
+    <p:sldId id="271" r:id="rId5"/>
+    <p:sldId id="258" r:id="rId6"/>
+    <p:sldId id="259" r:id="rId7"/>
+    <p:sldId id="264" r:id="rId8"/>
+    <p:sldId id="265" r:id="rId9"/>
+    <p:sldId id="266" r:id="rId10"/>
+    <p:sldId id="267" r:id="rId11"/>
+    <p:sldId id="268" r:id="rId12"/>
+    <p:sldId id="269" r:id="rId13"/>
+    <p:sldId id="270" r:id="rId14"/>
   </p:sldIdLst>
   <p:sldSz cx="12192000" cy="6858000"/>
   <p:notesSz cx="6858000" cy="9144000"/>
@@ -118,6 +119,11 @@
       </a:defRPr>
     </a:lvl9pPr>
   </p:defaultTextStyle>
+  <p:extLst>
+    <p:ext uri="{EFAFB233-063F-42B5-8137-9DF3F51BA10A}">
+      <p15:sldGuideLst xmlns:p15="http://schemas.microsoft.com/office/powerpoint/2012/main"/>
+    </p:ext>
+  </p:extLst>
 </p:presentation>
 </file>
 
@@ -203,7 +209,7 @@
           <a:p>
             <a:fld id="{A986CDDC-91EE-8844-A3E8-0EB83F1DF4FB}" type="datetimeFigureOut">
               <a:rPr lang="da-DK" smtClean="0"/>
-              <a:t>29.10.2026</a:t>
+              <a:t>30-10-2026</a:t>
             </a:fld>
             <a:endParaRPr lang="da-DK"/>
           </a:p>
@@ -361,7 +367,7 @@
           <a:p>
             <a:fld id="{EC22DFE1-A38A-DE48-8C13-936841F39ACD}" type="slidenum">
               <a:rPr lang="da-DK" smtClean="0"/>
-              <a:t>‹nr.›</a:t>
+              <a:t>‹#›</a:t>
             </a:fld>
             <a:endParaRPr lang="da-DK"/>
           </a:p>
@@ -643,7 +649,7 @@
           <a:p>
             <a:fld id="{EC22DFE1-A38A-DE48-8C13-936841F39ACD}" type="slidenum">
               <a:rPr lang="da-DK" smtClean="0"/>
-              <a:t>12</a:t>
+              <a:t>13</a:t>
             </a:fld>
             <a:endParaRPr lang="da-DK"/>
           </a:p>
@@ -751,7 +757,7 @@
           <a:p>
             <a:fld id="{EC22DFE1-A38A-DE48-8C13-936841F39ACD}" type="slidenum">
               <a:rPr lang="da-DK" smtClean="0"/>
-              <a:t>2</a:t>
+              <a:t>3</a:t>
             </a:fld>
             <a:endParaRPr lang="da-DK"/>
           </a:p>
@@ -835,7 +841,7 @@
           <a:p>
             <a:fld id="{EC22DFE1-A38A-DE48-8C13-936841F39ACD}" type="slidenum">
               <a:rPr lang="da-DK" smtClean="0"/>
-              <a:t>5</a:t>
+              <a:t>6</a:t>
             </a:fld>
             <a:endParaRPr lang="da-DK"/>
           </a:p>
@@ -943,7 +949,7 @@
           <a:p>
             <a:fld id="{EC22DFE1-A38A-DE48-8C13-936841F39ACD}" type="slidenum">
               <a:rPr lang="da-DK" smtClean="0"/>
-              <a:t>6</a:t>
+              <a:t>7</a:t>
             </a:fld>
             <a:endParaRPr lang="da-DK"/>
           </a:p>
@@ -1051,7 +1057,7 @@
           <a:p>
             <a:fld id="{EC22DFE1-A38A-DE48-8C13-936841F39ACD}" type="slidenum">
               <a:rPr lang="da-DK" smtClean="0"/>
-              <a:t>7</a:t>
+              <a:t>8</a:t>
             </a:fld>
             <a:endParaRPr lang="da-DK"/>
           </a:p>
@@ -1159,7 +1165,7 @@
           <a:p>
             <a:fld id="{EC22DFE1-A38A-DE48-8C13-936841F39ACD}" type="slidenum">
               <a:rPr lang="da-DK" smtClean="0"/>
-              <a:t>8</a:t>
+              <a:t>9</a:t>
             </a:fld>
             <a:endParaRPr lang="da-DK"/>
           </a:p>
@@ -1267,7 +1273,7 @@
           <a:p>
             <a:fld id="{EC22DFE1-A38A-DE48-8C13-936841F39ACD}" type="slidenum">
               <a:rPr lang="da-DK" smtClean="0"/>
-              <a:t>9</a:t>
+              <a:t>10</a:t>
             </a:fld>
             <a:endParaRPr lang="da-DK"/>
           </a:p>
@@ -1375,7 +1381,7 @@
           <a:p>
             <a:fld id="{EC22DFE1-A38A-DE48-8C13-936841F39ACD}" type="slidenum">
               <a:rPr lang="da-DK" smtClean="0"/>
-              <a:t>10</a:t>
+              <a:t>11</a:t>
             </a:fld>
             <a:endParaRPr lang="da-DK"/>
           </a:p>
@@ -1483,7 +1489,7 @@
           <a:p>
             <a:fld id="{EC22DFE1-A38A-DE48-8C13-936841F39ACD}" type="slidenum">
               <a:rPr lang="da-DK" smtClean="0"/>
-              <a:t>11</a:t>
+              <a:t>12</a:t>
             </a:fld>
             <a:endParaRPr lang="da-DK"/>
           </a:p>
@@ -1649,7 +1655,7 @@
           <a:p>
             <a:fld id="{9BDF5CDF-08C2-6A47-85D0-3E6B1BD1DD32}" type="datetimeFigureOut">
               <a:rPr lang="da-DK" smtClean="0"/>
-              <a:t>29.10.2026</a:t>
+              <a:t>30-10-2026</a:t>
             </a:fld>
             <a:endParaRPr lang="da-DK"/>
           </a:p>
@@ -1703,7 +1709,7 @@
           <a:p>
             <a:fld id="{3DC9ABE1-EFFA-B842-9542-1270863D4740}" type="slidenum">
               <a:rPr lang="da-DK" smtClean="0"/>
-              <a:t>‹nr.›</a:t>
+              <a:t>‹#›</a:t>
             </a:fld>
             <a:endParaRPr lang="da-DK"/>
           </a:p>
@@ -1847,7 +1853,7 @@
           <a:p>
             <a:fld id="{9BDF5CDF-08C2-6A47-85D0-3E6B1BD1DD32}" type="datetimeFigureOut">
               <a:rPr lang="da-DK" smtClean="0"/>
-              <a:t>29.10.2026</a:t>
+              <a:t>30-10-2026</a:t>
             </a:fld>
             <a:endParaRPr lang="da-DK"/>
           </a:p>
@@ -1901,7 +1907,7 @@
           <a:p>
             <a:fld id="{3DC9ABE1-EFFA-B842-9542-1270863D4740}" type="slidenum">
               <a:rPr lang="da-DK" smtClean="0"/>
-              <a:t>‹nr.›</a:t>
+              <a:t>‹#›</a:t>
             </a:fld>
             <a:endParaRPr lang="da-DK"/>
           </a:p>
@@ -2055,7 +2061,7 @@
           <a:p>
             <a:fld id="{9BDF5CDF-08C2-6A47-85D0-3E6B1BD1DD32}" type="datetimeFigureOut">
               <a:rPr lang="da-DK" smtClean="0"/>
-              <a:t>29.10.2026</a:t>
+              <a:t>30-10-2026</a:t>
             </a:fld>
             <a:endParaRPr lang="da-DK"/>
           </a:p>
@@ -2109,7 +2115,7 @@
           <a:p>
             <a:fld id="{3DC9ABE1-EFFA-B842-9542-1270863D4740}" type="slidenum">
               <a:rPr lang="da-DK" smtClean="0"/>
-              <a:t>‹nr.›</a:t>
+              <a:t>‹#›</a:t>
             </a:fld>
             <a:endParaRPr lang="da-DK"/>
           </a:p>
@@ -2253,7 +2259,7 @@
           <a:p>
             <a:fld id="{9BDF5CDF-08C2-6A47-85D0-3E6B1BD1DD32}" type="datetimeFigureOut">
               <a:rPr lang="da-DK" smtClean="0"/>
-              <a:t>29.10.2026</a:t>
+              <a:t>30-10-2026</a:t>
             </a:fld>
             <a:endParaRPr lang="da-DK"/>
           </a:p>
@@ -2307,7 +2313,7 @@
           <a:p>
             <a:fld id="{3DC9ABE1-EFFA-B842-9542-1270863D4740}" type="slidenum">
               <a:rPr lang="da-DK" smtClean="0"/>
-              <a:t>‹nr.›</a:t>
+              <a:t>‹#›</a:t>
             </a:fld>
             <a:endParaRPr lang="da-DK"/>
           </a:p>
@@ -2528,7 +2534,7 @@
           <a:p>
             <a:fld id="{9BDF5CDF-08C2-6A47-85D0-3E6B1BD1DD32}" type="datetimeFigureOut">
               <a:rPr lang="da-DK" smtClean="0"/>
-              <a:t>29.10.2026</a:t>
+              <a:t>30-10-2026</a:t>
             </a:fld>
             <a:endParaRPr lang="da-DK"/>
           </a:p>
@@ -2582,7 +2588,7 @@
           <a:p>
             <a:fld id="{3DC9ABE1-EFFA-B842-9542-1270863D4740}" type="slidenum">
               <a:rPr lang="da-DK" smtClean="0"/>
-              <a:t>‹nr.›</a:t>
+              <a:t>‹#›</a:t>
             </a:fld>
             <a:endParaRPr lang="da-DK"/>
           </a:p>
@@ -2793,7 +2799,7 @@
           <a:p>
             <a:fld id="{9BDF5CDF-08C2-6A47-85D0-3E6B1BD1DD32}" type="datetimeFigureOut">
               <a:rPr lang="da-DK" smtClean="0"/>
-              <a:t>29.10.2026</a:t>
+              <a:t>30-10-2026</a:t>
             </a:fld>
             <a:endParaRPr lang="da-DK"/>
           </a:p>
@@ -2847,7 +2853,7 @@
           <a:p>
             <a:fld id="{3DC9ABE1-EFFA-B842-9542-1270863D4740}" type="slidenum">
               <a:rPr lang="da-DK" smtClean="0"/>
-              <a:t>‹nr.›</a:t>
+              <a:t>‹#›</a:t>
             </a:fld>
             <a:endParaRPr lang="da-DK"/>
           </a:p>
@@ -3205,7 +3211,7 @@
           <a:p>
             <a:fld id="{9BDF5CDF-08C2-6A47-85D0-3E6B1BD1DD32}" type="datetimeFigureOut">
               <a:rPr lang="da-DK" smtClean="0"/>
-              <a:t>29.10.2026</a:t>
+              <a:t>30-10-2026</a:t>
             </a:fld>
             <a:endParaRPr lang="da-DK"/>
           </a:p>
@@ -3259,7 +3265,7 @@
           <a:p>
             <a:fld id="{3DC9ABE1-EFFA-B842-9542-1270863D4740}" type="slidenum">
               <a:rPr lang="da-DK" smtClean="0"/>
-              <a:t>‹nr.›</a:t>
+              <a:t>‹#›</a:t>
             </a:fld>
             <a:endParaRPr lang="da-DK"/>
           </a:p>
@@ -3346,7 +3352,7 @@
           <a:p>
             <a:fld id="{9BDF5CDF-08C2-6A47-85D0-3E6B1BD1DD32}" type="datetimeFigureOut">
               <a:rPr lang="da-DK" smtClean="0"/>
-              <a:t>29.10.2026</a:t>
+              <a:t>30-10-2026</a:t>
             </a:fld>
             <a:endParaRPr lang="da-DK"/>
           </a:p>
@@ -3400,7 +3406,7 @@
           <a:p>
             <a:fld id="{3DC9ABE1-EFFA-B842-9542-1270863D4740}" type="slidenum">
               <a:rPr lang="da-DK" smtClean="0"/>
-              <a:t>‹nr.›</a:t>
+              <a:t>‹#›</a:t>
             </a:fld>
             <a:endParaRPr lang="da-DK"/>
           </a:p>
@@ -3459,7 +3465,7 @@
           <a:p>
             <a:fld id="{9BDF5CDF-08C2-6A47-85D0-3E6B1BD1DD32}" type="datetimeFigureOut">
               <a:rPr lang="da-DK" smtClean="0"/>
-              <a:t>29.10.2026</a:t>
+              <a:t>30-10-2026</a:t>
             </a:fld>
             <a:endParaRPr lang="da-DK"/>
           </a:p>
@@ -3513,7 +3519,7 @@
           <a:p>
             <a:fld id="{3DC9ABE1-EFFA-B842-9542-1270863D4740}" type="slidenum">
               <a:rPr lang="da-DK" smtClean="0"/>
-              <a:t>‹nr.›</a:t>
+              <a:t>‹#›</a:t>
             </a:fld>
             <a:endParaRPr lang="da-DK"/>
           </a:p>
@@ -3770,7 +3776,7 @@
           <a:p>
             <a:fld id="{9BDF5CDF-08C2-6A47-85D0-3E6B1BD1DD32}" type="datetimeFigureOut">
               <a:rPr lang="da-DK" smtClean="0"/>
-              <a:t>29.10.2026</a:t>
+              <a:t>30-10-2026</a:t>
             </a:fld>
             <a:endParaRPr lang="da-DK"/>
           </a:p>
@@ -3824,7 +3830,7 @@
           <a:p>
             <a:fld id="{3DC9ABE1-EFFA-B842-9542-1270863D4740}" type="slidenum">
               <a:rPr lang="da-DK" smtClean="0"/>
-              <a:t>‹nr.›</a:t>
+              <a:t>‹#›</a:t>
             </a:fld>
             <a:endParaRPr lang="da-DK"/>
           </a:p>
@@ -4058,7 +4064,7 @@
           <a:p>
             <a:fld id="{9BDF5CDF-08C2-6A47-85D0-3E6B1BD1DD32}" type="datetimeFigureOut">
               <a:rPr lang="da-DK" smtClean="0"/>
-              <a:t>29.10.2026</a:t>
+              <a:t>30-10-2026</a:t>
             </a:fld>
             <a:endParaRPr lang="da-DK"/>
           </a:p>
@@ -4112,7 +4118,7 @@
           <a:p>
             <a:fld id="{3DC9ABE1-EFFA-B842-9542-1270863D4740}" type="slidenum">
               <a:rPr lang="da-DK" smtClean="0"/>
-              <a:t>‹nr.›</a:t>
+              <a:t>‹#›</a:t>
             </a:fld>
             <a:endParaRPr lang="da-DK"/>
           </a:p>
@@ -4299,7 +4305,7 @@
           <a:p>
             <a:fld id="{9BDF5CDF-08C2-6A47-85D0-3E6B1BD1DD32}" type="datetimeFigureOut">
               <a:rPr lang="da-DK" smtClean="0"/>
-              <a:t>29.10.2026</a:t>
+              <a:t>30-10-2026</a:t>
             </a:fld>
             <a:endParaRPr lang="da-DK"/>
           </a:p>
@@ -4389,7 +4395,7 @@
           <a:p>
             <a:fld id="{3DC9ABE1-EFFA-B842-9542-1270863D4740}" type="slidenum">
               <a:rPr lang="da-DK" smtClean="0"/>
-              <a:t>‹nr.›</a:t>
+              <a:t>‹#›</a:t>
             </a:fld>
             <a:endParaRPr lang="da-DK"/>
           </a:p>
@@ -4879,6 +4885,174 @@
         <p:cNvPr id="1" name="">
           <a:extLst>
             <a:ext uri="{FF2B5EF4-FFF2-40B4-BE49-F238E27FC236}">
+              <a16:creationId xmlns:a16="http://schemas.microsoft.com/office/drawing/2014/main" id="{AD500E61-DA40-9152-54D1-072C931F1CEB}"/>
+            </a:ext>
+          </a:extLst>
+        </p:cNvPr>
+        <p:cNvGrpSpPr/>
+        <p:nvPr/>
+      </p:nvGrpSpPr>
+      <p:grpSpPr>
+        <a:xfrm>
+          <a:off x="0" y="0"/>
+          <a:ext cx="0" cy="0"/>
+          <a:chOff x="0" y="0"/>
+          <a:chExt cx="0" cy="0"/>
+        </a:xfrm>
+      </p:grpSpPr>
+      <p:sp>
+        <p:nvSpPr>
+          <p:cNvPr id="2" name="Titel 1">
+            <a:extLst>
+              <a:ext uri="{FF2B5EF4-FFF2-40B4-BE49-F238E27FC236}">
+                <a16:creationId xmlns:a16="http://schemas.microsoft.com/office/drawing/2014/main" id="{EA2D4095-3FE1-F3C2-DF12-2BEE7C1E0717}"/>
+              </a:ext>
+            </a:extLst>
+          </p:cNvPr>
+          <p:cNvSpPr>
+            <a:spLocks noGrp="1"/>
+          </p:cNvSpPr>
+          <p:nvPr>
+            <p:ph type="title"/>
+          </p:nvPr>
+        </p:nvSpPr>
+        <p:spPr>
+          <a:xfrm>
+            <a:off x="1676400" y="372783"/>
+            <a:ext cx="10515600" cy="1325563"/>
+          </a:xfrm>
+        </p:spPr>
+        <p:txBody>
+          <a:bodyPr/>
+          <a:lstStyle/>
+          <a:p>
+            <a:r>
+              <a:rPr lang="da-DK" dirty="0" err="1"/>
+              <a:t>pixmo</a:t>
+            </a:r>
+            <a:r>
+              <a:rPr lang="da-DK" dirty="0"/>
+              <a:t>-cap-</a:t>
+            </a:r>
+            <a:r>
+              <a:rPr lang="da-DK" dirty="0" err="1"/>
+              <a:t>qna</a:t>
+            </a:r>
+            <a:endParaRPr lang="da-DK" dirty="0"/>
+          </a:p>
+        </p:txBody>
+      </p:sp>
+      <p:pic>
+        <p:nvPicPr>
+          <p:cNvPr id="4" name="Billede 3">
+            <a:extLst>
+              <a:ext uri="{FF2B5EF4-FFF2-40B4-BE49-F238E27FC236}">
+                <a16:creationId xmlns:a16="http://schemas.microsoft.com/office/drawing/2014/main" id="{6EC8BA8C-4665-82D2-C82B-2F65E8EF514C}"/>
+              </a:ext>
+            </a:extLst>
+          </p:cNvPr>
+          <p:cNvPicPr>
+            <a:picLocks noChangeAspect="1"/>
+          </p:cNvPicPr>
+          <p:nvPr/>
+        </p:nvPicPr>
+        <p:blipFill>
+          <a:blip r:embed="rId3"/>
+          <a:stretch>
+            <a:fillRect/>
+          </a:stretch>
+        </p:blipFill>
+        <p:spPr>
+          <a:xfrm>
+            <a:off x="1338133" y="1517370"/>
+            <a:ext cx="9515733" cy="4967847"/>
+          </a:xfrm>
+          <a:prstGeom prst="rect">
+            <a:avLst/>
+          </a:prstGeom>
+        </p:spPr>
+      </p:pic>
+      <p:pic>
+        <p:nvPicPr>
+          <p:cNvPr id="3" name="Billede 2">
+            <a:extLst>
+              <a:ext uri="{FF2B5EF4-FFF2-40B4-BE49-F238E27FC236}">
+                <a16:creationId xmlns:a16="http://schemas.microsoft.com/office/drawing/2014/main" id="{AD30BBA6-FC87-3ED9-3658-8BDED83767A9}"/>
+              </a:ext>
+            </a:extLst>
+          </p:cNvPr>
+          <p:cNvPicPr>
+            <a:picLocks noChangeAspect="1"/>
+          </p:cNvPicPr>
+          <p:nvPr/>
+        </p:nvPicPr>
+        <p:blipFill>
+          <a:blip r:embed="rId4"/>
+          <a:stretch>
+            <a:fillRect/>
+          </a:stretch>
+        </p:blipFill>
+        <p:spPr>
+          <a:xfrm>
+            <a:off x="1560040" y="1411865"/>
+            <a:ext cx="9071919" cy="5073352"/>
+          </a:xfrm>
+          <a:prstGeom prst="rect">
+            <a:avLst/>
+          </a:prstGeom>
+        </p:spPr>
+      </p:pic>
+      <p:pic>
+        <p:nvPicPr>
+          <p:cNvPr id="5" name="Billede 4">
+            <a:extLst>
+              <a:ext uri="{FF2B5EF4-FFF2-40B4-BE49-F238E27FC236}">
+                <a16:creationId xmlns:a16="http://schemas.microsoft.com/office/drawing/2014/main" id="{FD3A686B-532D-9AC9-BF2C-1586722D4299}"/>
+              </a:ext>
+            </a:extLst>
+          </p:cNvPr>
+          <p:cNvPicPr>
+            <a:picLocks noChangeAspect="1"/>
+          </p:cNvPicPr>
+          <p:nvPr/>
+        </p:nvPicPr>
+        <p:blipFill>
+          <a:blip r:embed="rId5"/>
+          <a:stretch>
+            <a:fillRect/>
+          </a:stretch>
+        </p:blipFill>
+        <p:spPr>
+          <a:xfrm>
+            <a:off x="1560040" y="1411865"/>
+            <a:ext cx="9071918" cy="5079542"/>
+          </a:xfrm>
+          <a:prstGeom prst="rect">
+            <a:avLst/>
+          </a:prstGeom>
+        </p:spPr>
+      </p:pic>
+    </p:spTree>
+    <p:extLst>
+      <p:ext uri="{BB962C8B-B14F-4D97-AF65-F5344CB8AC3E}">
+        <p14:creationId xmlns:p14="http://schemas.microsoft.com/office/powerpoint/2010/main" val="801592595"/>
+      </p:ext>
+    </p:extLst>
+  </p:cSld>
+  <p:clrMapOvr>
+    <a:masterClrMapping/>
+  </p:clrMapOvr>
+</p:sld>
+</file>
+
+<file path=ppt/slides/slide11.xml><?xml version="1.0" encoding="utf-8"?>
+<p:sld xmlns:a="http://schemas.openxmlformats.org/drawingml/2006/main" xmlns:r="http://schemas.openxmlformats.org/officeDocument/2006/relationships" xmlns:p="http://schemas.openxmlformats.org/presentationml/2006/main">
+  <p:cSld>
+    <p:spTree>
+      <p:nvGrpSpPr>
+        <p:cNvPr id="1" name="">
+          <a:extLst>
+            <a:ext uri="{FF2B5EF4-FFF2-40B4-BE49-F238E27FC236}">
               <a16:creationId xmlns:a16="http://schemas.microsoft.com/office/drawing/2014/main" id="{EC2CF2C6-7850-F8E0-9CCF-FC656BEFCA50}"/>
             </a:ext>
           </a:extLst>
@@ -5009,7 +5183,7 @@
 </p:sld>
 </file>
 
-<file path=ppt/slides/slide11.xml><?xml version="1.0" encoding="utf-8"?>
+<file path=ppt/slides/slide12.xml><?xml version="1.0" encoding="utf-8"?>
 <p:sld xmlns:a="http://schemas.openxmlformats.org/drawingml/2006/main" xmlns:r="http://schemas.openxmlformats.org/officeDocument/2006/relationships" xmlns:p="http://schemas.openxmlformats.org/presentationml/2006/main">
   <p:cSld>
     <p:spTree>
@@ -5207,7 +5381,7 @@
 </p:sld>
 </file>
 
-<file path=ppt/slides/slide12.xml><?xml version="1.0" encoding="utf-8"?>
+<file path=ppt/slides/slide13.xml><?xml version="1.0" encoding="utf-8"?>
 <p:sld xmlns:a="http://schemas.openxmlformats.org/drawingml/2006/main" xmlns:r="http://schemas.openxmlformats.org/officeDocument/2006/relationships" xmlns:p="http://schemas.openxmlformats.org/presentationml/2006/main">
   <p:cSld>
     <p:spTree>
@@ -5277,6 +5451,106 @@
 </file>
 
 <file path=ppt/slides/slide2.xml><?xml version="1.0" encoding="utf-8"?>
+<p:sld xmlns:a="http://schemas.openxmlformats.org/drawingml/2006/main" xmlns:r="http://schemas.openxmlformats.org/officeDocument/2006/relationships" xmlns:p="http://schemas.openxmlformats.org/presentationml/2006/main">
+  <p:cSld>
+    <p:spTree>
+      <p:nvGrpSpPr>
+        <p:cNvPr id="1" name=""/>
+        <p:cNvGrpSpPr/>
+        <p:nvPr/>
+      </p:nvGrpSpPr>
+      <p:grpSpPr>
+        <a:xfrm>
+          <a:off x="0" y="0"/>
+          <a:ext cx="0" cy="0"/>
+          <a:chOff x="0" y="0"/>
+          <a:chExt cx="0" cy="0"/>
+        </a:xfrm>
+      </p:grpSpPr>
+      <p:sp>
+        <p:nvSpPr>
+          <p:cNvPr id="2" name="Title 1">
+            <a:extLst>
+              <a:ext uri="{FF2B5EF4-FFF2-40B4-BE49-F238E27FC236}">
+                <a16:creationId xmlns:a16="http://schemas.microsoft.com/office/drawing/2014/main" id="{3BF55463-DB13-9380-24B0-D4715966CDB1}"/>
+              </a:ext>
+            </a:extLst>
+          </p:cNvPr>
+          <p:cNvSpPr>
+            <a:spLocks noGrp="1"/>
+          </p:cNvSpPr>
+          <p:nvPr>
+            <p:ph type="title"/>
+          </p:nvPr>
+        </p:nvSpPr>
+        <p:spPr/>
+        <p:txBody>
+          <a:bodyPr/>
+          <a:lstStyle/>
+          <a:p>
+            <a:r>
+              <a:rPr lang="da-DK" dirty="0"/>
+              <a:t>Outline</a:t>
+            </a:r>
+            <a:endParaRPr lang="en-DK" dirty="0"/>
+          </a:p>
+        </p:txBody>
+      </p:sp>
+      <p:sp>
+        <p:nvSpPr>
+          <p:cNvPr id="3" name="Content Placeholder 2">
+            <a:extLst>
+              <a:ext uri="{FF2B5EF4-FFF2-40B4-BE49-F238E27FC236}">
+                <a16:creationId xmlns:a16="http://schemas.microsoft.com/office/drawing/2014/main" id="{233894C3-513D-E4E3-E5A7-79938FD35956}"/>
+              </a:ext>
+            </a:extLst>
+          </p:cNvPr>
+          <p:cNvSpPr>
+            <a:spLocks noGrp="1"/>
+          </p:cNvSpPr>
+          <p:nvPr>
+            <p:ph idx="1"/>
+          </p:nvPr>
+        </p:nvSpPr>
+        <p:spPr/>
+        <p:txBody>
+          <a:bodyPr/>
+          <a:lstStyle/>
+          <a:p>
+            <a:r>
+              <a:rPr lang="da-DK" dirty="0"/>
+              <a:t>Introduction</a:t>
+            </a:r>
+          </a:p>
+          <a:p>
+            <a:r>
+              <a:rPr lang="da-DK" dirty="0"/>
+              <a:t>Research question</a:t>
+            </a:r>
+          </a:p>
+          <a:p>
+            <a:r>
+              <a:rPr lang="da-DK" dirty="0"/>
+              <a:t>Pipeline</a:t>
+            </a:r>
+            <a:endParaRPr lang="en-DK" dirty="0"/>
+          </a:p>
+        </p:txBody>
+      </p:sp>
+    </p:spTree>
+    <p:extLst>
+      <p:ext uri="{BB962C8B-B14F-4D97-AF65-F5344CB8AC3E}">
+        <p14:creationId xmlns:p14="http://schemas.microsoft.com/office/powerpoint/2010/main" val="2649847413"/>
+      </p:ext>
+    </p:extLst>
+  </p:cSld>
+  <p:clrMapOvr>
+    <a:masterClrMapping/>
+  </p:clrMapOvr>
+</p:sld>
+</file>
+
+<file path=ppt/slides/slide3.xml><?xml version="1.0" encoding="utf-8"?>
 <p:sld xmlns:a="http://schemas.openxmlformats.org/drawingml/2006/main" xmlns:r="http://schemas.openxmlformats.org/officeDocument/2006/relationships" xmlns:p="http://schemas.openxmlformats.org/presentationml/2006/main">
   <p:cSld>
     <p:spTree>
@@ -5342,86 +5616,6 @@
 </p:sld>
 </file>
 
-<file path=ppt/slides/slide3.xml><?xml version="1.0" encoding="utf-8"?>
-<p:sld xmlns:a="http://schemas.openxmlformats.org/drawingml/2006/main" xmlns:r="http://schemas.openxmlformats.org/officeDocument/2006/relationships" xmlns:p="http://schemas.openxmlformats.org/presentationml/2006/main">
-  <p:cSld>
-    <p:spTree>
-      <p:nvGrpSpPr>
-        <p:cNvPr id="1" name=""/>
-        <p:cNvGrpSpPr/>
-        <p:nvPr/>
-      </p:nvGrpSpPr>
-      <p:grpSpPr>
-        <a:xfrm>
-          <a:off x="0" y="0"/>
-          <a:ext cx="0" cy="0"/>
-          <a:chOff x="0" y="0"/>
-          <a:chExt cx="0" cy="0"/>
-        </a:xfrm>
-      </p:grpSpPr>
-      <p:sp>
-        <p:nvSpPr>
-          <p:cNvPr id="2" name="Titel 1">
-            <a:extLst>
-              <a:ext uri="{FF2B5EF4-FFF2-40B4-BE49-F238E27FC236}">
-                <a16:creationId xmlns:a16="http://schemas.microsoft.com/office/drawing/2014/main" id="{66DDF663-C425-F819-D6A8-EB20FBAE158E}"/>
-              </a:ext>
-            </a:extLst>
-          </p:cNvPr>
-          <p:cNvSpPr>
-            <a:spLocks noGrp="1"/>
-          </p:cNvSpPr>
-          <p:nvPr>
-            <p:ph type="title"/>
-          </p:nvPr>
-        </p:nvSpPr>
-        <p:spPr/>
-        <p:txBody>
-          <a:bodyPr/>
-          <a:lstStyle/>
-          <a:p>
-            <a:endParaRPr lang="da-DK"/>
-          </a:p>
-        </p:txBody>
-      </p:sp>
-      <p:sp>
-        <p:nvSpPr>
-          <p:cNvPr id="3" name="Pladsholder til indhold 2">
-            <a:extLst>
-              <a:ext uri="{FF2B5EF4-FFF2-40B4-BE49-F238E27FC236}">
-                <a16:creationId xmlns:a16="http://schemas.microsoft.com/office/drawing/2014/main" id="{982FE697-B9B7-421D-5807-167368A787DE}"/>
-              </a:ext>
-            </a:extLst>
-          </p:cNvPr>
-          <p:cNvSpPr>
-            <a:spLocks noGrp="1"/>
-          </p:cNvSpPr>
-          <p:nvPr>
-            <p:ph idx="1"/>
-          </p:nvPr>
-        </p:nvSpPr>
-        <p:spPr/>
-        <p:txBody>
-          <a:bodyPr/>
-          <a:lstStyle/>
-          <a:p>
-            <a:endParaRPr lang="da-DK"/>
-          </a:p>
-        </p:txBody>
-      </p:sp>
-    </p:spTree>
-    <p:extLst>
-      <p:ext uri="{BB962C8B-B14F-4D97-AF65-F5344CB8AC3E}">
-        <p14:creationId xmlns:p14="http://schemas.microsoft.com/office/powerpoint/2010/main" val="2576544998"/>
-      </p:ext>
-    </p:extLst>
-  </p:cSld>
-  <p:clrMapOvr>
-    <a:masterClrMapping/>
-  </p:clrMapOvr>
-</p:sld>
-</file>
-
 <file path=ppt/slides/slide4.xml><?xml version="1.0" encoding="utf-8"?>
 <p:sld xmlns:a="http://schemas.openxmlformats.org/drawingml/2006/main" xmlns:r="http://schemas.openxmlformats.org/officeDocument/2006/relationships" xmlns:p="http://schemas.openxmlformats.org/presentationml/2006/main">
   <p:cSld>
@@ -5444,6 +5638,89 @@
           <p:cNvPr id="2" name="Titel 1">
             <a:extLst>
               <a:ext uri="{FF2B5EF4-FFF2-40B4-BE49-F238E27FC236}">
+                <a16:creationId xmlns:a16="http://schemas.microsoft.com/office/drawing/2014/main" id="{66DDF663-C425-F819-D6A8-EB20FBAE158E}"/>
+              </a:ext>
+            </a:extLst>
+          </p:cNvPr>
+          <p:cNvSpPr>
+            <a:spLocks noGrp="1"/>
+          </p:cNvSpPr>
+          <p:nvPr>
+            <p:ph type="title"/>
+          </p:nvPr>
+        </p:nvSpPr>
+        <p:spPr/>
+        <p:txBody>
+          <a:bodyPr/>
+          <a:lstStyle/>
+          <a:p>
+            <a:r>
+              <a:rPr lang="da-DK" dirty="0"/>
+              <a:t>Introduction</a:t>
+            </a:r>
+          </a:p>
+        </p:txBody>
+      </p:sp>
+      <p:sp>
+        <p:nvSpPr>
+          <p:cNvPr id="3" name="Pladsholder til indhold 2">
+            <a:extLst>
+              <a:ext uri="{FF2B5EF4-FFF2-40B4-BE49-F238E27FC236}">
+                <a16:creationId xmlns:a16="http://schemas.microsoft.com/office/drawing/2014/main" id="{982FE697-B9B7-421D-5807-167368A787DE}"/>
+              </a:ext>
+            </a:extLst>
+          </p:cNvPr>
+          <p:cNvSpPr>
+            <a:spLocks noGrp="1"/>
+          </p:cNvSpPr>
+          <p:nvPr>
+            <p:ph idx="1"/>
+          </p:nvPr>
+        </p:nvSpPr>
+        <p:spPr/>
+        <p:txBody>
+          <a:bodyPr/>
+          <a:lstStyle/>
+          <a:p>
+            <a:endParaRPr lang="da-DK"/>
+          </a:p>
+        </p:txBody>
+      </p:sp>
+    </p:spTree>
+    <p:extLst>
+      <p:ext uri="{BB962C8B-B14F-4D97-AF65-F5344CB8AC3E}">
+        <p14:creationId xmlns:p14="http://schemas.microsoft.com/office/powerpoint/2010/main" val="2576544998"/>
+      </p:ext>
+    </p:extLst>
+  </p:cSld>
+  <p:clrMapOvr>
+    <a:masterClrMapping/>
+  </p:clrMapOvr>
+</p:sld>
+</file>
+
+<file path=ppt/slides/slide5.xml><?xml version="1.0" encoding="utf-8"?>
+<p:sld xmlns:a="http://schemas.openxmlformats.org/drawingml/2006/main" xmlns:r="http://schemas.openxmlformats.org/officeDocument/2006/relationships" xmlns:p="http://schemas.openxmlformats.org/presentationml/2006/main">
+  <p:cSld>
+    <p:spTree>
+      <p:nvGrpSpPr>
+        <p:cNvPr id="1" name=""/>
+        <p:cNvGrpSpPr/>
+        <p:nvPr/>
+      </p:nvGrpSpPr>
+      <p:grpSpPr>
+        <a:xfrm>
+          <a:off x="0" y="0"/>
+          <a:ext cx="0" cy="0"/>
+          <a:chOff x="0" y="0"/>
+          <a:chExt cx="0" cy="0"/>
+        </a:xfrm>
+      </p:grpSpPr>
+      <p:sp>
+        <p:nvSpPr>
+          <p:cNvPr id="2" name="Titel 1">
+            <a:extLst>
+              <a:ext uri="{FF2B5EF4-FFF2-40B4-BE49-F238E27FC236}">
                 <a16:creationId xmlns:a16="http://schemas.microsoft.com/office/drawing/2014/main" id="{0D2AC728-D8DE-C587-B41A-BA969832BBD3}"/>
               </a:ext>
             </a:extLst>
@@ -5460,7 +5737,10 @@
           <a:bodyPr/>
           <a:lstStyle/>
           <a:p>
-            <a:endParaRPr lang="da-DK"/>
+            <a:r>
+              <a:rPr lang="da-DK" dirty="0"/>
+              <a:t>Research question</a:t>
+            </a:r>
           </a:p>
         </p:txBody>
       </p:sp>
@@ -5511,7 +5791,7 @@
         </p:blipFill>
         <p:spPr>
           <a:xfrm>
-            <a:off x="1315349" y="1456453"/>
+            <a:off x="838200" y="1825625"/>
             <a:ext cx="9561302" cy="3945094"/>
           </a:xfrm>
           <a:prstGeom prst="rect">
@@ -5532,7 +5812,7 @@
 </p:sld>
 </file>
 
-<file path=ppt/slides/slide5.xml><?xml version="1.0" encoding="utf-8"?>
+<file path=ppt/slides/slide6.xml><?xml version="1.0" encoding="utf-8"?>
 <p:sld xmlns:a="http://schemas.openxmlformats.org/drawingml/2006/main" xmlns:r="http://schemas.openxmlformats.org/officeDocument/2006/relationships" xmlns:p="http://schemas.openxmlformats.org/presentationml/2006/main">
   <p:cSld>
     <p:spTree>
@@ -5625,7 +5905,7 @@
 </p:sld>
 </file>
 
-<file path=ppt/slides/slide6.xml><?xml version="1.0" encoding="utf-8"?>
+<file path=ppt/slides/slide7.xml><?xml version="1.0" encoding="utf-8"?>
 <p:sld xmlns:a="http://schemas.openxmlformats.org/drawingml/2006/main" xmlns:r="http://schemas.openxmlformats.org/officeDocument/2006/relationships" xmlns:p="http://schemas.openxmlformats.org/presentationml/2006/main">
   <p:cSld>
     <p:spTree>
@@ -5724,7 +6004,7 @@
 </p:sld>
 </file>
 
-<file path=ppt/slides/slide7.xml><?xml version="1.0" encoding="utf-8"?>
+<file path=ppt/slides/slide8.xml><?xml version="1.0" encoding="utf-8"?>
 <p:sld xmlns:a="http://schemas.openxmlformats.org/drawingml/2006/main" xmlns:r="http://schemas.openxmlformats.org/officeDocument/2006/relationships" xmlns:p="http://schemas.openxmlformats.org/presentationml/2006/main">
   <p:cSld>
     <p:spTree>
@@ -5857,7 +6137,7 @@
 </p:sld>
 </file>
 
-<file path=ppt/slides/slide8.xml><?xml version="1.0" encoding="utf-8"?>
+<file path=ppt/slides/slide9.xml><?xml version="1.0" encoding="utf-8"?>
 <p:sld xmlns:a="http://schemas.openxmlformats.org/drawingml/2006/main" xmlns:r="http://schemas.openxmlformats.org/officeDocument/2006/relationships" xmlns:p="http://schemas.openxmlformats.org/presentationml/2006/main">
   <p:cSld>
     <p:spTree>
@@ -6008,174 +6288,6 @@
     <p:extLst>
       <p:ext uri="{BB962C8B-B14F-4D97-AF65-F5344CB8AC3E}">
         <p14:creationId xmlns:p14="http://schemas.microsoft.com/office/powerpoint/2010/main" val="1731147189"/>
-      </p:ext>
-    </p:extLst>
-  </p:cSld>
-  <p:clrMapOvr>
-    <a:masterClrMapping/>
-  </p:clrMapOvr>
-</p:sld>
-</file>
-
-<file path=ppt/slides/slide9.xml><?xml version="1.0" encoding="utf-8"?>
-<p:sld xmlns:a="http://schemas.openxmlformats.org/drawingml/2006/main" xmlns:r="http://schemas.openxmlformats.org/officeDocument/2006/relationships" xmlns:p="http://schemas.openxmlformats.org/presentationml/2006/main">
-  <p:cSld>
-    <p:spTree>
-      <p:nvGrpSpPr>
-        <p:cNvPr id="1" name="">
-          <a:extLst>
-            <a:ext uri="{FF2B5EF4-FFF2-40B4-BE49-F238E27FC236}">
-              <a16:creationId xmlns:a16="http://schemas.microsoft.com/office/drawing/2014/main" id="{AD500E61-DA40-9152-54D1-072C931F1CEB}"/>
-            </a:ext>
-          </a:extLst>
-        </p:cNvPr>
-        <p:cNvGrpSpPr/>
-        <p:nvPr/>
-      </p:nvGrpSpPr>
-      <p:grpSpPr>
-        <a:xfrm>
-          <a:off x="0" y="0"/>
-          <a:ext cx="0" cy="0"/>
-          <a:chOff x="0" y="0"/>
-          <a:chExt cx="0" cy="0"/>
-        </a:xfrm>
-      </p:grpSpPr>
-      <p:sp>
-        <p:nvSpPr>
-          <p:cNvPr id="2" name="Titel 1">
-            <a:extLst>
-              <a:ext uri="{FF2B5EF4-FFF2-40B4-BE49-F238E27FC236}">
-                <a16:creationId xmlns:a16="http://schemas.microsoft.com/office/drawing/2014/main" id="{EA2D4095-3FE1-F3C2-DF12-2BEE7C1E0717}"/>
-              </a:ext>
-            </a:extLst>
-          </p:cNvPr>
-          <p:cNvSpPr>
-            <a:spLocks noGrp="1"/>
-          </p:cNvSpPr>
-          <p:nvPr>
-            <p:ph type="title"/>
-          </p:nvPr>
-        </p:nvSpPr>
-        <p:spPr>
-          <a:xfrm>
-            <a:off x="1676400" y="372783"/>
-            <a:ext cx="10515600" cy="1325563"/>
-          </a:xfrm>
-        </p:spPr>
-        <p:txBody>
-          <a:bodyPr/>
-          <a:lstStyle/>
-          <a:p>
-            <a:r>
-              <a:rPr lang="da-DK" dirty="0" err="1"/>
-              <a:t>pixmo</a:t>
-            </a:r>
-            <a:r>
-              <a:rPr lang="da-DK" dirty="0"/>
-              <a:t>-cap-</a:t>
-            </a:r>
-            <a:r>
-              <a:rPr lang="da-DK" dirty="0" err="1"/>
-              <a:t>qna</a:t>
-            </a:r>
-            <a:endParaRPr lang="da-DK" dirty="0"/>
-          </a:p>
-        </p:txBody>
-      </p:sp>
-      <p:pic>
-        <p:nvPicPr>
-          <p:cNvPr id="4" name="Billede 3">
-            <a:extLst>
-              <a:ext uri="{FF2B5EF4-FFF2-40B4-BE49-F238E27FC236}">
-                <a16:creationId xmlns:a16="http://schemas.microsoft.com/office/drawing/2014/main" id="{6EC8BA8C-4665-82D2-C82B-2F65E8EF514C}"/>
-              </a:ext>
-            </a:extLst>
-          </p:cNvPr>
-          <p:cNvPicPr>
-            <a:picLocks noChangeAspect="1"/>
-          </p:cNvPicPr>
-          <p:nvPr/>
-        </p:nvPicPr>
-        <p:blipFill>
-          <a:blip r:embed="rId3"/>
-          <a:stretch>
-            <a:fillRect/>
-          </a:stretch>
-        </p:blipFill>
-        <p:spPr>
-          <a:xfrm>
-            <a:off x="1338133" y="1517370"/>
-            <a:ext cx="9515733" cy="4967847"/>
-          </a:xfrm>
-          <a:prstGeom prst="rect">
-            <a:avLst/>
-          </a:prstGeom>
-        </p:spPr>
-      </p:pic>
-      <p:pic>
-        <p:nvPicPr>
-          <p:cNvPr id="3" name="Billede 2">
-            <a:extLst>
-              <a:ext uri="{FF2B5EF4-FFF2-40B4-BE49-F238E27FC236}">
-                <a16:creationId xmlns:a16="http://schemas.microsoft.com/office/drawing/2014/main" id="{AD30BBA6-FC87-3ED9-3658-8BDED83767A9}"/>
-              </a:ext>
-            </a:extLst>
-          </p:cNvPr>
-          <p:cNvPicPr>
-            <a:picLocks noChangeAspect="1"/>
-          </p:cNvPicPr>
-          <p:nvPr/>
-        </p:nvPicPr>
-        <p:blipFill>
-          <a:blip r:embed="rId4"/>
-          <a:stretch>
-            <a:fillRect/>
-          </a:stretch>
-        </p:blipFill>
-        <p:spPr>
-          <a:xfrm>
-            <a:off x="1560040" y="1411865"/>
-            <a:ext cx="9071919" cy="5073352"/>
-          </a:xfrm>
-          <a:prstGeom prst="rect">
-            <a:avLst/>
-          </a:prstGeom>
-        </p:spPr>
-      </p:pic>
-      <p:pic>
-        <p:nvPicPr>
-          <p:cNvPr id="5" name="Billede 4">
-            <a:extLst>
-              <a:ext uri="{FF2B5EF4-FFF2-40B4-BE49-F238E27FC236}">
-                <a16:creationId xmlns:a16="http://schemas.microsoft.com/office/drawing/2014/main" id="{FD3A686B-532D-9AC9-BF2C-1586722D4299}"/>
-              </a:ext>
-            </a:extLst>
-          </p:cNvPr>
-          <p:cNvPicPr>
-            <a:picLocks noChangeAspect="1"/>
-          </p:cNvPicPr>
-          <p:nvPr/>
-        </p:nvPicPr>
-        <p:blipFill>
-          <a:blip r:embed="rId5"/>
-          <a:stretch>
-            <a:fillRect/>
-          </a:stretch>
-        </p:blipFill>
-        <p:spPr>
-          <a:xfrm>
-            <a:off x="1560040" y="1411865"/>
-            <a:ext cx="9071918" cy="5079542"/>
-          </a:xfrm>
-          <a:prstGeom prst="rect">
-            <a:avLst/>
-          </a:prstGeom>
-        </p:spPr>
-      </p:pic>
-    </p:spTree>
-    <p:extLst>
-      <p:ext uri="{BB962C8B-B14F-4D97-AF65-F5344CB8AC3E}">
-        <p14:creationId xmlns:p14="http://schemas.microsoft.com/office/powerpoint/2010/main" val="801592595"/>
       </p:ext>
     </p:extLst>
   </p:cSld>

--- a/Præsentation1.pptx
+++ b/Præsentation1.pptx
@@ -5,7 +5,7 @@
     <p:sldMasterId id="2147483648" r:id="rId1"/>
   </p:sldMasterIdLst>
   <p:notesMasterIdLst>
-    <p:notesMasterId r:id="rId15"/>
+    <p:notesMasterId r:id="rId17"/>
   </p:notesMasterIdLst>
   <p:sldIdLst>
     <p:sldId id="256" r:id="rId2"/>
@@ -13,14 +13,16 @@
     <p:sldId id="257" r:id="rId4"/>
     <p:sldId id="271" r:id="rId5"/>
     <p:sldId id="258" r:id="rId6"/>
-    <p:sldId id="259" r:id="rId7"/>
-    <p:sldId id="264" r:id="rId8"/>
-    <p:sldId id="265" r:id="rId9"/>
-    <p:sldId id="266" r:id="rId10"/>
-    <p:sldId id="267" r:id="rId11"/>
-    <p:sldId id="268" r:id="rId12"/>
-    <p:sldId id="269" r:id="rId13"/>
-    <p:sldId id="270" r:id="rId14"/>
+    <p:sldId id="274" r:id="rId7"/>
+    <p:sldId id="259" r:id="rId8"/>
+    <p:sldId id="264" r:id="rId9"/>
+    <p:sldId id="265" r:id="rId10"/>
+    <p:sldId id="266" r:id="rId11"/>
+    <p:sldId id="267" r:id="rId12"/>
+    <p:sldId id="268" r:id="rId13"/>
+    <p:sldId id="269" r:id="rId14"/>
+    <p:sldId id="270" r:id="rId15"/>
+    <p:sldId id="273" r:id="rId16"/>
   </p:sldIdLst>
   <p:sldSz cx="12192000" cy="6858000"/>
   <p:notesSz cx="6858000" cy="9144000"/>
@@ -649,7 +651,7 @@
           <a:p>
             <a:fld id="{EC22DFE1-A38A-DE48-8C13-936841F39ACD}" type="slidenum">
               <a:rPr lang="da-DK" smtClean="0"/>
-              <a:t>13</a:t>
+              <a:t>14</a:t>
             </a:fld>
             <a:endParaRPr lang="da-DK"/>
           </a:p>
@@ -841,7 +843,7 @@
           <a:p>
             <a:fld id="{EC22DFE1-A38A-DE48-8C13-936841F39ACD}" type="slidenum">
               <a:rPr lang="da-DK" smtClean="0"/>
-              <a:t>6</a:t>
+              <a:t>7</a:t>
             </a:fld>
             <a:endParaRPr lang="da-DK"/>
           </a:p>
@@ -949,7 +951,7 @@
           <a:p>
             <a:fld id="{EC22DFE1-A38A-DE48-8C13-936841F39ACD}" type="slidenum">
               <a:rPr lang="da-DK" smtClean="0"/>
-              <a:t>7</a:t>
+              <a:t>8</a:t>
             </a:fld>
             <a:endParaRPr lang="da-DK"/>
           </a:p>
@@ -1057,7 +1059,7 @@
           <a:p>
             <a:fld id="{EC22DFE1-A38A-DE48-8C13-936841F39ACD}" type="slidenum">
               <a:rPr lang="da-DK" smtClean="0"/>
-              <a:t>8</a:t>
+              <a:t>9</a:t>
             </a:fld>
             <a:endParaRPr lang="da-DK"/>
           </a:p>
@@ -1165,7 +1167,7 @@
           <a:p>
             <a:fld id="{EC22DFE1-A38A-DE48-8C13-936841F39ACD}" type="slidenum">
               <a:rPr lang="da-DK" smtClean="0"/>
-              <a:t>9</a:t>
+              <a:t>10</a:t>
             </a:fld>
             <a:endParaRPr lang="da-DK"/>
           </a:p>
@@ -1273,7 +1275,7 @@
           <a:p>
             <a:fld id="{EC22DFE1-A38A-DE48-8C13-936841F39ACD}" type="slidenum">
               <a:rPr lang="da-DK" smtClean="0"/>
-              <a:t>10</a:t>
+              <a:t>11</a:t>
             </a:fld>
             <a:endParaRPr lang="da-DK"/>
           </a:p>
@@ -1381,7 +1383,7 @@
           <a:p>
             <a:fld id="{EC22DFE1-A38A-DE48-8C13-936841F39ACD}" type="slidenum">
               <a:rPr lang="da-DK" smtClean="0"/>
-              <a:t>11</a:t>
+              <a:t>12</a:t>
             </a:fld>
             <a:endParaRPr lang="da-DK"/>
           </a:p>
@@ -1489,7 +1491,7 @@
           <a:p>
             <a:fld id="{EC22DFE1-A38A-DE48-8C13-936841F39ACD}" type="slidenum">
               <a:rPr lang="da-DK" smtClean="0"/>
-              <a:t>12</a:t>
+              <a:t>13</a:t>
             </a:fld>
             <a:endParaRPr lang="da-DK"/>
           </a:p>
@@ -4885,6 +4887,166 @@
         <p:cNvPr id="1" name="">
           <a:extLst>
             <a:ext uri="{FF2B5EF4-FFF2-40B4-BE49-F238E27FC236}">
+              <a16:creationId xmlns:a16="http://schemas.microsoft.com/office/drawing/2014/main" id="{0011BA88-6253-4B61-20A4-F4AEBD67EDC7}"/>
+            </a:ext>
+          </a:extLst>
+        </p:cNvPr>
+        <p:cNvGrpSpPr/>
+        <p:nvPr/>
+      </p:nvGrpSpPr>
+      <p:grpSpPr>
+        <a:xfrm>
+          <a:off x="0" y="0"/>
+          <a:ext cx="0" cy="0"/>
+          <a:chOff x="0" y="0"/>
+          <a:chExt cx="0" cy="0"/>
+        </a:xfrm>
+      </p:grpSpPr>
+      <p:sp>
+        <p:nvSpPr>
+          <p:cNvPr id="2" name="Titel 1">
+            <a:extLst>
+              <a:ext uri="{FF2B5EF4-FFF2-40B4-BE49-F238E27FC236}">
+                <a16:creationId xmlns:a16="http://schemas.microsoft.com/office/drawing/2014/main" id="{237C2286-81EC-6F6A-7EF0-8F2B7830FA3C}"/>
+              </a:ext>
+            </a:extLst>
+          </p:cNvPr>
+          <p:cNvSpPr>
+            <a:spLocks noGrp="1"/>
+          </p:cNvSpPr>
+          <p:nvPr>
+            <p:ph type="title"/>
+          </p:nvPr>
+        </p:nvSpPr>
+        <p:spPr>
+          <a:xfrm>
+            <a:off x="1676400" y="372783"/>
+            <a:ext cx="10515600" cy="1325563"/>
+          </a:xfrm>
+        </p:spPr>
+        <p:txBody>
+          <a:bodyPr/>
+          <a:lstStyle/>
+          <a:p>
+            <a:r>
+              <a:rPr lang="da-DK" dirty="0" err="1"/>
+              <a:t>pixmo-count</a:t>
+            </a:r>
+            <a:endParaRPr lang="da-DK" dirty="0"/>
+          </a:p>
+        </p:txBody>
+      </p:sp>
+      <p:pic>
+        <p:nvPicPr>
+          <p:cNvPr id="4" name="Billede 3">
+            <a:extLst>
+              <a:ext uri="{FF2B5EF4-FFF2-40B4-BE49-F238E27FC236}">
+                <a16:creationId xmlns:a16="http://schemas.microsoft.com/office/drawing/2014/main" id="{6D19AB54-AEE4-63E8-0B6F-199D193A3FA2}"/>
+              </a:ext>
+            </a:extLst>
+          </p:cNvPr>
+          <p:cNvPicPr>
+            <a:picLocks noChangeAspect="1"/>
+          </p:cNvPicPr>
+          <p:nvPr/>
+        </p:nvPicPr>
+        <p:blipFill>
+          <a:blip r:embed="rId3"/>
+          <a:stretch>
+            <a:fillRect/>
+          </a:stretch>
+        </p:blipFill>
+        <p:spPr>
+          <a:xfrm>
+            <a:off x="1338133" y="1517370"/>
+            <a:ext cx="9515733" cy="4967847"/>
+          </a:xfrm>
+          <a:prstGeom prst="rect">
+            <a:avLst/>
+          </a:prstGeom>
+        </p:spPr>
+      </p:pic>
+      <p:pic>
+        <p:nvPicPr>
+          <p:cNvPr id="3" name="Billede 2">
+            <a:extLst>
+              <a:ext uri="{FF2B5EF4-FFF2-40B4-BE49-F238E27FC236}">
+                <a16:creationId xmlns:a16="http://schemas.microsoft.com/office/drawing/2014/main" id="{5759988B-7CC2-8461-D667-C3C0DA80C085}"/>
+              </a:ext>
+            </a:extLst>
+          </p:cNvPr>
+          <p:cNvPicPr>
+            <a:picLocks noChangeAspect="1"/>
+          </p:cNvPicPr>
+          <p:nvPr/>
+        </p:nvPicPr>
+        <p:blipFill>
+          <a:blip r:embed="rId4"/>
+          <a:stretch>
+            <a:fillRect/>
+          </a:stretch>
+        </p:blipFill>
+        <p:spPr>
+          <a:xfrm>
+            <a:off x="1560040" y="1411865"/>
+            <a:ext cx="9071919" cy="5073352"/>
+          </a:xfrm>
+          <a:prstGeom prst="rect">
+            <a:avLst/>
+          </a:prstGeom>
+        </p:spPr>
+      </p:pic>
+      <p:pic>
+        <p:nvPicPr>
+          <p:cNvPr id="6" name="Billede 5">
+            <a:extLst>
+              <a:ext uri="{FF2B5EF4-FFF2-40B4-BE49-F238E27FC236}">
+                <a16:creationId xmlns:a16="http://schemas.microsoft.com/office/drawing/2014/main" id="{9CACE311-96A3-27C0-7941-CBB29FB9849E}"/>
+              </a:ext>
+            </a:extLst>
+          </p:cNvPr>
+          <p:cNvPicPr>
+            <a:picLocks noChangeAspect="1"/>
+          </p:cNvPicPr>
+          <p:nvPr/>
+        </p:nvPicPr>
+        <p:blipFill>
+          <a:blip r:embed="rId5"/>
+          <a:stretch>
+            <a:fillRect/>
+          </a:stretch>
+        </p:blipFill>
+        <p:spPr>
+          <a:xfrm>
+            <a:off x="1560039" y="1411864"/>
+            <a:ext cx="9071919" cy="5069333"/>
+          </a:xfrm>
+          <a:prstGeom prst="rect">
+            <a:avLst/>
+          </a:prstGeom>
+        </p:spPr>
+      </p:pic>
+    </p:spTree>
+    <p:extLst>
+      <p:ext uri="{BB962C8B-B14F-4D97-AF65-F5344CB8AC3E}">
+        <p14:creationId xmlns:p14="http://schemas.microsoft.com/office/powerpoint/2010/main" val="1731147189"/>
+      </p:ext>
+    </p:extLst>
+  </p:cSld>
+  <p:clrMapOvr>
+    <a:masterClrMapping/>
+  </p:clrMapOvr>
+</p:sld>
+</file>
+
+<file path=ppt/slides/slide11.xml><?xml version="1.0" encoding="utf-8"?>
+<p:sld xmlns:a="http://schemas.openxmlformats.org/drawingml/2006/main" xmlns:r="http://schemas.openxmlformats.org/officeDocument/2006/relationships" xmlns:p="http://schemas.openxmlformats.org/presentationml/2006/main">
+  <p:cSld>
+    <p:spTree>
+      <p:nvGrpSpPr>
+        <p:cNvPr id="1" name="">
+          <a:extLst>
+            <a:ext uri="{FF2B5EF4-FFF2-40B4-BE49-F238E27FC236}">
               <a16:creationId xmlns:a16="http://schemas.microsoft.com/office/drawing/2014/main" id="{AD500E61-DA40-9152-54D1-072C931F1CEB}"/>
             </a:ext>
           </a:extLst>
@@ -5045,7 +5207,7 @@
 </p:sld>
 </file>
 
-<file path=ppt/slides/slide11.xml><?xml version="1.0" encoding="utf-8"?>
+<file path=ppt/slides/slide12.xml><?xml version="1.0" encoding="utf-8"?>
 <p:sld xmlns:a="http://schemas.openxmlformats.org/drawingml/2006/main" xmlns:r="http://schemas.openxmlformats.org/officeDocument/2006/relationships" xmlns:p="http://schemas.openxmlformats.org/presentationml/2006/main">
   <p:cSld>
     <p:spTree>
@@ -5183,7 +5345,7 @@
 </p:sld>
 </file>
 
-<file path=ppt/slides/slide12.xml><?xml version="1.0" encoding="utf-8"?>
+<file path=ppt/slides/slide13.xml><?xml version="1.0" encoding="utf-8"?>
 <p:sld xmlns:a="http://schemas.openxmlformats.org/drawingml/2006/main" xmlns:r="http://schemas.openxmlformats.org/officeDocument/2006/relationships" xmlns:p="http://schemas.openxmlformats.org/presentationml/2006/main">
   <p:cSld>
     <p:spTree>
@@ -5381,7 +5543,7 @@
 </p:sld>
 </file>
 
-<file path=ppt/slides/slide13.xml><?xml version="1.0" encoding="utf-8"?>
+<file path=ppt/slides/slide14.xml><?xml version="1.0" encoding="utf-8"?>
 <p:sld xmlns:a="http://schemas.openxmlformats.org/drawingml/2006/main" xmlns:r="http://schemas.openxmlformats.org/officeDocument/2006/relationships" xmlns:p="http://schemas.openxmlformats.org/presentationml/2006/main">
   <p:cSld>
     <p:spTree>
@@ -5441,6 +5603,90 @@
     <p:extLst>
       <p:ext uri="{BB962C8B-B14F-4D97-AF65-F5344CB8AC3E}">
         <p14:creationId xmlns:p14="http://schemas.microsoft.com/office/powerpoint/2010/main" val="408772622"/>
+      </p:ext>
+    </p:extLst>
+  </p:cSld>
+  <p:clrMapOvr>
+    <a:masterClrMapping/>
+  </p:clrMapOvr>
+</p:sld>
+</file>
+
+<file path=ppt/slides/slide15.xml><?xml version="1.0" encoding="utf-8"?>
+<p:sld xmlns:a="http://schemas.openxmlformats.org/drawingml/2006/main" xmlns:r="http://schemas.openxmlformats.org/officeDocument/2006/relationships" xmlns:p="http://schemas.openxmlformats.org/presentationml/2006/main">
+  <p:cSld>
+    <p:spTree>
+      <p:nvGrpSpPr>
+        <p:cNvPr id="1" name=""/>
+        <p:cNvGrpSpPr/>
+        <p:nvPr/>
+      </p:nvGrpSpPr>
+      <p:grpSpPr>
+        <a:xfrm>
+          <a:off x="0" y="0"/>
+          <a:ext cx="0" cy="0"/>
+          <a:chOff x="0" y="0"/>
+          <a:chExt cx="0" cy="0"/>
+        </a:xfrm>
+      </p:grpSpPr>
+      <p:sp>
+        <p:nvSpPr>
+          <p:cNvPr id="2" name="Title 1">
+            <a:extLst>
+              <a:ext uri="{FF2B5EF4-FFF2-40B4-BE49-F238E27FC236}">
+                <a16:creationId xmlns:a16="http://schemas.microsoft.com/office/drawing/2014/main" id="{E0656EA1-218C-572F-4109-DACB004009BE}"/>
+              </a:ext>
+            </a:extLst>
+          </p:cNvPr>
+          <p:cNvSpPr>
+            <a:spLocks noGrp="1"/>
+          </p:cNvSpPr>
+          <p:nvPr>
+            <p:ph type="title"/>
+          </p:nvPr>
+        </p:nvSpPr>
+        <p:spPr/>
+        <p:txBody>
+          <a:bodyPr/>
+          <a:lstStyle/>
+          <a:p>
+            <a:r>
+              <a:rPr lang="da-DK" dirty="0"/>
+              <a:t>Bibliography</a:t>
+            </a:r>
+            <a:endParaRPr lang="en-DK" dirty="0"/>
+          </a:p>
+        </p:txBody>
+      </p:sp>
+      <p:sp>
+        <p:nvSpPr>
+          <p:cNvPr id="3" name="Content Placeholder 2">
+            <a:extLst>
+              <a:ext uri="{FF2B5EF4-FFF2-40B4-BE49-F238E27FC236}">
+                <a16:creationId xmlns:a16="http://schemas.microsoft.com/office/drawing/2014/main" id="{3D5B9E10-CFA3-103F-8759-6C42FCB76F26}"/>
+              </a:ext>
+            </a:extLst>
+          </p:cNvPr>
+          <p:cNvSpPr>
+            <a:spLocks noGrp="1"/>
+          </p:cNvSpPr>
+          <p:nvPr>
+            <p:ph idx="1"/>
+          </p:nvPr>
+        </p:nvSpPr>
+        <p:spPr/>
+        <p:txBody>
+          <a:bodyPr/>
+          <a:lstStyle/>
+          <a:p>
+            <a:endParaRPr lang="en-DK" dirty="0"/>
+          </a:p>
+        </p:txBody>
+      </p:sp>
+    </p:spTree>
+    <p:extLst>
+      <p:ext uri="{BB962C8B-B14F-4D97-AF65-F5344CB8AC3E}">
+        <p14:creationId xmlns:p14="http://schemas.microsoft.com/office/powerpoint/2010/main" val="2721178178"/>
       </p:ext>
     </p:extLst>
   </p:cSld>
@@ -5682,7 +5928,7 @@
           <a:bodyPr/>
           <a:lstStyle/>
           <a:p>
-            <a:endParaRPr lang="da-DK"/>
+            <a:endParaRPr lang="da-DK" dirty="0"/>
           </a:p>
         </p:txBody>
       </p:sp>
@@ -5831,6 +6077,90 @@
       </p:grpSpPr>
       <p:sp>
         <p:nvSpPr>
+          <p:cNvPr id="2" name="Title 1">
+            <a:extLst>
+              <a:ext uri="{FF2B5EF4-FFF2-40B4-BE49-F238E27FC236}">
+                <a16:creationId xmlns:a16="http://schemas.microsoft.com/office/drawing/2014/main" id="{062C2BB3-378C-4C48-ABDE-0ADEEED6C426}"/>
+              </a:ext>
+            </a:extLst>
+          </p:cNvPr>
+          <p:cNvSpPr>
+            <a:spLocks noGrp="1"/>
+          </p:cNvSpPr>
+          <p:nvPr>
+            <p:ph type="title"/>
+          </p:nvPr>
+        </p:nvSpPr>
+        <p:spPr/>
+        <p:txBody>
+          <a:bodyPr/>
+          <a:lstStyle/>
+          <a:p>
+            <a:r>
+              <a:rPr lang="da-DK" dirty="0"/>
+              <a:t>HRM-Text</a:t>
+            </a:r>
+            <a:endParaRPr lang="en-DK" dirty="0"/>
+          </a:p>
+        </p:txBody>
+      </p:sp>
+      <p:sp>
+        <p:nvSpPr>
+          <p:cNvPr id="3" name="Content Placeholder 2">
+            <a:extLst>
+              <a:ext uri="{FF2B5EF4-FFF2-40B4-BE49-F238E27FC236}">
+                <a16:creationId xmlns:a16="http://schemas.microsoft.com/office/drawing/2014/main" id="{FC4D28AC-4B67-C360-10B9-BF30B068C669}"/>
+              </a:ext>
+            </a:extLst>
+          </p:cNvPr>
+          <p:cNvSpPr>
+            <a:spLocks noGrp="1"/>
+          </p:cNvSpPr>
+          <p:nvPr>
+            <p:ph idx="1"/>
+          </p:nvPr>
+        </p:nvSpPr>
+        <p:spPr/>
+        <p:txBody>
+          <a:bodyPr/>
+          <a:lstStyle/>
+          <a:p>
+            <a:endParaRPr lang="en-DK" dirty="0"/>
+          </a:p>
+        </p:txBody>
+      </p:sp>
+    </p:spTree>
+    <p:extLst>
+      <p:ext uri="{BB962C8B-B14F-4D97-AF65-F5344CB8AC3E}">
+        <p14:creationId xmlns:p14="http://schemas.microsoft.com/office/powerpoint/2010/main" val="3769576631"/>
+      </p:ext>
+    </p:extLst>
+  </p:cSld>
+  <p:clrMapOvr>
+    <a:masterClrMapping/>
+  </p:clrMapOvr>
+</p:sld>
+</file>
+
+<file path=ppt/slides/slide7.xml><?xml version="1.0" encoding="utf-8"?>
+<p:sld xmlns:a="http://schemas.openxmlformats.org/drawingml/2006/main" xmlns:r="http://schemas.openxmlformats.org/officeDocument/2006/relationships" xmlns:p="http://schemas.openxmlformats.org/presentationml/2006/main">
+  <p:cSld>
+    <p:spTree>
+      <p:nvGrpSpPr>
+        <p:cNvPr id="1" name=""/>
+        <p:cNvGrpSpPr/>
+        <p:nvPr/>
+      </p:nvGrpSpPr>
+      <p:grpSpPr>
+        <a:xfrm>
+          <a:off x="0" y="0"/>
+          <a:ext cx="0" cy="0"/>
+          <a:chOff x="0" y="0"/>
+          <a:chExt cx="0" cy="0"/>
+        </a:xfrm>
+      </p:grpSpPr>
+      <p:sp>
+        <p:nvSpPr>
           <p:cNvPr id="2" name="Titel 1">
             <a:extLst>
               <a:ext uri="{FF2B5EF4-FFF2-40B4-BE49-F238E27FC236}">
@@ -5905,7 +6235,7 @@
 </p:sld>
 </file>
 
-<file path=ppt/slides/slide7.xml><?xml version="1.0" encoding="utf-8"?>
+<file path=ppt/slides/slide8.xml><?xml version="1.0" encoding="utf-8"?>
 <p:sld xmlns:a="http://schemas.openxmlformats.org/drawingml/2006/main" xmlns:r="http://schemas.openxmlformats.org/officeDocument/2006/relationships" xmlns:p="http://schemas.openxmlformats.org/presentationml/2006/main">
   <p:cSld>
     <p:spTree>
@@ -6004,7 +6334,7 @@
 </p:sld>
 </file>
 
-<file path=ppt/slides/slide8.xml><?xml version="1.0" encoding="utf-8"?>
+<file path=ppt/slides/slide9.xml><?xml version="1.0" encoding="utf-8"?>
 <p:sld xmlns:a="http://schemas.openxmlformats.org/drawingml/2006/main" xmlns:r="http://schemas.openxmlformats.org/officeDocument/2006/relationships" xmlns:p="http://schemas.openxmlformats.org/presentationml/2006/main">
   <p:cSld>
     <p:spTree>
@@ -6128,166 +6458,6 @@
     <p:extLst>
       <p:ext uri="{BB962C8B-B14F-4D97-AF65-F5344CB8AC3E}">
         <p14:creationId xmlns:p14="http://schemas.microsoft.com/office/powerpoint/2010/main" val="206797589"/>
-      </p:ext>
-    </p:extLst>
-  </p:cSld>
-  <p:clrMapOvr>
-    <a:masterClrMapping/>
-  </p:clrMapOvr>
-</p:sld>
-</file>
-
-<file path=ppt/slides/slide9.xml><?xml version="1.0" encoding="utf-8"?>
-<p:sld xmlns:a="http://schemas.openxmlformats.org/drawingml/2006/main" xmlns:r="http://schemas.openxmlformats.org/officeDocument/2006/relationships" xmlns:p="http://schemas.openxmlformats.org/presentationml/2006/main">
-  <p:cSld>
-    <p:spTree>
-      <p:nvGrpSpPr>
-        <p:cNvPr id="1" name="">
-          <a:extLst>
-            <a:ext uri="{FF2B5EF4-FFF2-40B4-BE49-F238E27FC236}">
-              <a16:creationId xmlns:a16="http://schemas.microsoft.com/office/drawing/2014/main" id="{0011BA88-6253-4B61-20A4-F4AEBD67EDC7}"/>
-            </a:ext>
-          </a:extLst>
-        </p:cNvPr>
-        <p:cNvGrpSpPr/>
-        <p:nvPr/>
-      </p:nvGrpSpPr>
-      <p:grpSpPr>
-        <a:xfrm>
-          <a:off x="0" y="0"/>
-          <a:ext cx="0" cy="0"/>
-          <a:chOff x="0" y="0"/>
-          <a:chExt cx="0" cy="0"/>
-        </a:xfrm>
-      </p:grpSpPr>
-      <p:sp>
-        <p:nvSpPr>
-          <p:cNvPr id="2" name="Titel 1">
-            <a:extLst>
-              <a:ext uri="{FF2B5EF4-FFF2-40B4-BE49-F238E27FC236}">
-                <a16:creationId xmlns:a16="http://schemas.microsoft.com/office/drawing/2014/main" id="{237C2286-81EC-6F6A-7EF0-8F2B7830FA3C}"/>
-              </a:ext>
-            </a:extLst>
-          </p:cNvPr>
-          <p:cNvSpPr>
-            <a:spLocks noGrp="1"/>
-          </p:cNvSpPr>
-          <p:nvPr>
-            <p:ph type="title"/>
-          </p:nvPr>
-        </p:nvSpPr>
-        <p:spPr>
-          <a:xfrm>
-            <a:off x="1676400" y="372783"/>
-            <a:ext cx="10515600" cy="1325563"/>
-          </a:xfrm>
-        </p:spPr>
-        <p:txBody>
-          <a:bodyPr/>
-          <a:lstStyle/>
-          <a:p>
-            <a:r>
-              <a:rPr lang="da-DK" dirty="0" err="1"/>
-              <a:t>pixmo-count</a:t>
-            </a:r>
-            <a:endParaRPr lang="da-DK" dirty="0"/>
-          </a:p>
-        </p:txBody>
-      </p:sp>
-      <p:pic>
-        <p:nvPicPr>
-          <p:cNvPr id="4" name="Billede 3">
-            <a:extLst>
-              <a:ext uri="{FF2B5EF4-FFF2-40B4-BE49-F238E27FC236}">
-                <a16:creationId xmlns:a16="http://schemas.microsoft.com/office/drawing/2014/main" id="{6D19AB54-AEE4-63E8-0B6F-199D193A3FA2}"/>
-              </a:ext>
-            </a:extLst>
-          </p:cNvPr>
-          <p:cNvPicPr>
-            <a:picLocks noChangeAspect="1"/>
-          </p:cNvPicPr>
-          <p:nvPr/>
-        </p:nvPicPr>
-        <p:blipFill>
-          <a:blip r:embed="rId3"/>
-          <a:stretch>
-            <a:fillRect/>
-          </a:stretch>
-        </p:blipFill>
-        <p:spPr>
-          <a:xfrm>
-            <a:off x="1338133" y="1517370"/>
-            <a:ext cx="9515733" cy="4967847"/>
-          </a:xfrm>
-          <a:prstGeom prst="rect">
-            <a:avLst/>
-          </a:prstGeom>
-        </p:spPr>
-      </p:pic>
-      <p:pic>
-        <p:nvPicPr>
-          <p:cNvPr id="3" name="Billede 2">
-            <a:extLst>
-              <a:ext uri="{FF2B5EF4-FFF2-40B4-BE49-F238E27FC236}">
-                <a16:creationId xmlns:a16="http://schemas.microsoft.com/office/drawing/2014/main" id="{5759988B-7CC2-8461-D667-C3C0DA80C085}"/>
-              </a:ext>
-            </a:extLst>
-          </p:cNvPr>
-          <p:cNvPicPr>
-            <a:picLocks noChangeAspect="1"/>
-          </p:cNvPicPr>
-          <p:nvPr/>
-        </p:nvPicPr>
-        <p:blipFill>
-          <a:blip r:embed="rId4"/>
-          <a:stretch>
-            <a:fillRect/>
-          </a:stretch>
-        </p:blipFill>
-        <p:spPr>
-          <a:xfrm>
-            <a:off x="1560040" y="1411865"/>
-            <a:ext cx="9071919" cy="5073352"/>
-          </a:xfrm>
-          <a:prstGeom prst="rect">
-            <a:avLst/>
-          </a:prstGeom>
-        </p:spPr>
-      </p:pic>
-      <p:pic>
-        <p:nvPicPr>
-          <p:cNvPr id="6" name="Billede 5">
-            <a:extLst>
-              <a:ext uri="{FF2B5EF4-FFF2-40B4-BE49-F238E27FC236}">
-                <a16:creationId xmlns:a16="http://schemas.microsoft.com/office/drawing/2014/main" id="{9CACE311-96A3-27C0-7941-CBB29FB9849E}"/>
-              </a:ext>
-            </a:extLst>
-          </p:cNvPr>
-          <p:cNvPicPr>
-            <a:picLocks noChangeAspect="1"/>
-          </p:cNvPicPr>
-          <p:nvPr/>
-        </p:nvPicPr>
-        <p:blipFill>
-          <a:blip r:embed="rId5"/>
-          <a:stretch>
-            <a:fillRect/>
-          </a:stretch>
-        </p:blipFill>
-        <p:spPr>
-          <a:xfrm>
-            <a:off x="1560039" y="1411864"/>
-            <a:ext cx="9071919" cy="5069333"/>
-          </a:xfrm>
-          <a:prstGeom prst="rect">
-            <a:avLst/>
-          </a:prstGeom>
-        </p:spPr>
-      </p:pic>
-    </p:spTree>
-    <p:extLst>
-      <p:ext uri="{BB962C8B-B14F-4D97-AF65-F5344CB8AC3E}">
-        <p14:creationId xmlns:p14="http://schemas.microsoft.com/office/powerpoint/2010/main" val="1731147189"/>
       </p:ext>
     </p:extLst>
   </p:cSld>
